--- a/vta/slides/Module_2_Recognizing_Respiratory_Failure.pptx
+++ b/vta/slides/Module_2_Recognizing_Respiratory_Failure.pptx
@@ -867,7 +867,7 @@
               <a:t>Acute respiratory failure is defined by gas-exchange criteria. Type I, hypoxic respiratory failure, is PaO₂ less than 60 mmHg on room air. The CO₂ is typically normal or low because the patient is hyperventilating in compensation. Common causes: pneumonia, acute pulmonary edema, ARDS, pulmonary embolism, pulmonary contusion.
 Type II, hypercapnic respiratory failure, is PaCO₂ greater than 50 mmHg accompanied by a pH less than 7.35. The pH requirement matters because chronic CO₂ retainers (stable COPD, for example) live with PaCO₂ in the 60s while their kidneys retain bicarbonate, keeping pH near normal. An acute rise in CO₂ has no time to compensate — pH crashes, and that acidosis defines the failure.
 Mixed failure (Type I + Type II) is common: pneumonia in a COPD patient, ARDS with respiratory fatigue. Treat what you see.
-PEARL — ABGs in EMS: We rarely have an arterial blood gas prehospital. Clinical signs + EtCO₂ + SpO₂ give us the same diagnosis a few minutes earlier than the lab does. Don't wait for the gas.</a:t>
+PEARL — ABGs in EMS: We rarely have an arterial blood gas prehospital. Clinical signs + EtCO₂ + SpO₂ support recognition and let you act early — but they do NOT replace an ABG. The PaCO₂–EtCO₂ gap widens with shock and V/Q mismatch, so EtCO₂ can under-read a rising PaCO₂. Treat on the clinical picture; confirm gas exchange with an ABG when available.</a:t>
             </a:r>
             <a:endParaRPr lang="en-US" dirty="0"/>
           </a:p>
@@ -2055,7 +2055,7 @@
                 <a:ea typeface="Calibri" pitchFamily="34" charset="-122"/>
                 <a:cs typeface="Calibri" pitchFamily="34" charset="-120"/>
               </a:rPr>
-              <a:t>Day 1 · Foundations</a:t>
+              <a:t>Foundations</a:t>
             </a:r>
             <a:pPr indent="0" marL="0">
               <a:buNone/>
@@ -2069,7 +2069,7 @@
                 <a:ea typeface="Calibri" pitchFamily="34" charset="-122"/>
                 <a:cs typeface="Calibri" pitchFamily="34" charset="-120"/>
               </a:rPr>
-              <a:t>   ·   ~45 min   ·   7 lessons</a:t>
+              <a:t>   ·   7 lessons</a:t>
             </a:r>
             <a:endParaRPr lang="en-US" sz="1300" dirty="0"/>
           </a:p>
@@ -2632,7 +2632,9 @@
       </p:sp>
       <p:sp>
         <p:nvSpPr>
-          <p:cNvPr id="14" name="Text 12"/>
+          <p:cNvPr id="14" name="Text 12">
+            <a:hlinkClick r:id="rId1" tooltip="Open this module's simulator mission"/>
+          </p:cNvPr>
           <p:cNvSpPr/>
           <p:nvPr/>
         </p:nvSpPr>
@@ -2655,13 +2657,20 @@
               <a:buNone/>
             </a:pPr>
             <a:r>
-              <a:rPr lang="en-US" sz="1700" b="1" dirty="0">
+              <a:rPr lang="en-US" sz="1700" b="1" u="sng" dirty="0">
                 <a:solidFill>
                   <a:srgbClr val="FFFFFF"/>
                 </a:solidFill>
                 <a:latin typeface="Calibri" pitchFamily="34" charset="0"/>
                 <a:ea typeface="Calibri" pitchFamily="34" charset="-122"/>
                 <a:cs typeface="Calibri" pitchFamily="34" charset="-120"/>
+                <a:hlinkClick r:id="rId1" invalidUrl="" action="" tgtFrame="" tooltip="Open this module's simulator mission" history="1" highlightClick="0" endSnd="0">
+                  <a:extLst>
+                    <a:ext uri="{A12FA001-AC4F-418D-AE19-62706E023703}">
+                      <ahyp:hlinkClr xmlns:ahyp="http://schemas.microsoft.com/office/drawing/2018/hyperlinkcolor" val="tx"/>
+                    </a:ext>
+                  </a:extLst>
+                </a:hlinkClick>
               </a:rPr>
               <a:t>LTV 1200 Simulator</a:t>
             </a:r>
@@ -2694,13 +2703,20 @@
               <a:buNone/>
             </a:pPr>
             <a:r>
-              <a:rPr lang="en-US" sz="1250" dirty="0">
-                <a:solidFill>
-                  <a:srgbClr val="A9C2E0"/>
-                </a:solidFill>
-                <a:latin typeface="Calibri" pitchFamily="34" charset="0"/>
-                <a:ea typeface="Calibri" pitchFamily="34" charset="-122"/>
-                <a:cs typeface="Calibri" pitchFamily="34" charset="-120"/>
+              <a:rPr lang="en-US" sz="1250" u="sng" dirty="0">
+                <a:solidFill>
+                  <a:srgbClr val="7FB0E6"/>
+                </a:solidFill>
+                <a:latin typeface="Calibri" pitchFamily="34" charset="0"/>
+                <a:ea typeface="Calibri" pitchFamily="34" charset="-122"/>
+                <a:cs typeface="Calibri" pitchFamily="34" charset="-120"/>
+                <a:hlinkClick r:id="rId2" invalidUrl="" action="" tgtFrame="" tooltip="" history="1" highlightClick="0" endSnd="0">
+                  <a:extLst>
+                    <a:ext uri="{A12FA001-AC4F-418D-AE19-62706E023703}">
+                      <ahyp:hlinkClr xmlns:ahyp="http://schemas.microsoft.com/office/drawing/2018/hyperlinkcolor" val="tx"/>
+                    </a:ext>
+                  </a:extLst>
+                </a:hlinkClick>
               </a:rPr>
               <a:t>vent-ltv1200.html?scenario=failure-type  —  Name the failure type from the monitor, then treat it — oxygenation vs ventilation.</a:t>
             </a:r>
@@ -2875,7 +2891,7 @@
                 <a:ea typeface="Calibri" pitchFamily="34" charset="-122"/>
                 <a:cs typeface="Calibri" pitchFamily="34" charset="-120"/>
               </a:rPr>
-              <a:t>We rarely have an arterial blood gas prehospital. Clinical signs + EtCO₂ + SpO₂ give us the same diagnosis a few minutes earlier than the lab does.…</a:t>
+              <a:t>We rarely have an arterial blood gas prehospital. Clinical signs + EtCO₂ + SpO₂ support recognition and let you act early — but they do NOT replace…</a:t>
             </a:r>
             <a:endParaRPr lang="en-US" sz="1700" dirty="0"/>
           </a:p>
@@ -4271,7 +4287,7 @@
         <p:spPr>
           <a:xfrm>
             <a:off x="548640" y="2148840"/>
-            <a:ext cx="6309360" cy="4114800"/>
+            <a:ext cx="6309360" cy="4160520"/>
           </a:xfrm>
           <a:prstGeom prst="rect">
             <a:avLst/>
@@ -4288,7 +4304,7 @@
                 <a:spcPct val="100000"/>
               </a:lnSpc>
               <a:spcAft>
-                <a:spcPts val="900"/>
+                <a:spcPts val="1000"/>
               </a:spcAft>
               <a:buSzPct val="100000"/>
               <a:buChar char="•"/>
@@ -4302,7 +4318,7 @@
                 <a:ea typeface="Calibri" pitchFamily="34" charset="-122"/>
                 <a:cs typeface="Calibri" pitchFamily="34" charset="-120"/>
               </a:rPr>
-              <a:t>Acute respiratory failure is defined by gas-exchange criteria.</a:t>
+              <a:t>Acute respiratory failure is defined by gas-exchange criteria. Type I, hypoxic respiratory failure, is PaO₂ less than 60 mmHg on room air.</a:t>
             </a:r>
             <a:endParaRPr lang="en-US" sz="1550" dirty="0"/>
           </a:p>
@@ -4312,7 +4328,7 @@
                 <a:spcPct val="100000"/>
               </a:lnSpc>
               <a:spcAft>
-                <a:spcPts val="900"/>
+                <a:spcPts val="1000"/>
               </a:spcAft>
               <a:buSzPct val="100000"/>
               <a:buChar char="•"/>
@@ -4336,7 +4352,7 @@
                 <a:spcPct val="100000"/>
               </a:lnSpc>
               <a:spcAft>
-                <a:spcPts val="900"/>
+                <a:spcPts val="1000"/>
               </a:spcAft>
               <a:buSzPct val="100000"/>
               <a:buChar char="•"/>
@@ -4350,7 +4366,7 @@
                 <a:ea typeface="Calibri" pitchFamily="34" charset="-122"/>
                 <a:cs typeface="Calibri" pitchFamily="34" charset="-120"/>
               </a:rPr>
-              <a:t>Mixed failure (Type I + Type II) is common: pneumonia in a COPD patient, ARDS with respiratory fatigue.</a:t>
+              <a:t>Mixed failure (Type I + Type II) is common: pneumonia in a COPD patient, ARDS with respiratory fatigue. Treat what you see.</a:t>
             </a:r>
             <a:endParaRPr lang="en-US" sz="1550" dirty="0"/>
           </a:p>
@@ -4495,7 +4511,7 @@
                 <a:ea typeface="Calibri" pitchFamily="34" charset="-122"/>
                 <a:cs typeface="Calibri" pitchFamily="34" charset="-120"/>
               </a:rPr>
-              <a:t>We rarely have an arterial blood gas prehospital. Clinical signs + EtCO₂ + SpO₂ give us the same diagnosis a few minutes earlier than the lab does. Don't wait for the gas.</a:t>
+              <a:t>We rarely have an arterial blood gas prehospital. Clinical signs + EtCO₂ + SpO₂ support recognition and let you act early — but they do NOT replace an ABG. The PaCO₂–EtCO₂ gap widens with shock and V/Q mismatch, so EtCO₂ can under-read a rising PaCO₂. Treat on the clinical picture; confirm gas…</a:t>
             </a:r>
             <a:endParaRPr lang="en-US" sz="1350" dirty="0"/>
           </a:p>
@@ -4659,7 +4675,7 @@
         <p:spPr>
           <a:xfrm>
             <a:off x="548640" y="2148840"/>
-            <a:ext cx="6309360" cy="4114800"/>
+            <a:ext cx="6309360" cy="4160520"/>
           </a:xfrm>
           <a:prstGeom prst="rect">
             <a:avLst/>
@@ -4676,13 +4692,13 @@
                 <a:spcPct val="100000"/>
               </a:lnSpc>
               <a:spcAft>
-                <a:spcPts val="900"/>
+                <a:spcPts val="800"/>
               </a:spcAft>
               <a:buSzPct val="100000"/>
               <a:buChar char="•"/>
             </a:pPr>
             <a:r>
-              <a:rPr lang="en-US" sz="1550" dirty="0">
+              <a:rPr lang="en-US" sz="1450" dirty="0">
                 <a:solidFill>
                   <a:srgbClr val="1B2433"/>
                 </a:solidFill>
@@ -4692,7 +4708,7 @@
               </a:rPr>
               <a:t>Pulse oximetry is not linear — the SpO₂/PaO₂ relationship is an S-shaped curve, and that shape is a flat tabletop that ends at a cliff.</a:t>
             </a:r>
-            <a:endParaRPr lang="en-US" sz="1550" dirty="0"/>
+            <a:endParaRPr lang="en-US" sz="1450" dirty="0"/>
           </a:p>
           <a:p>
             <a:pPr marL="177800" indent="-177800">
@@ -4700,13 +4716,13 @@
                 <a:spcPct val="100000"/>
               </a:lnSpc>
               <a:spcAft>
-                <a:spcPts val="900"/>
+                <a:spcPts val="800"/>
               </a:spcAft>
               <a:buSzPct val="100000"/>
               <a:buChar char="•"/>
             </a:pPr>
             <a:r>
-              <a:rPr lang="en-US" sz="1550" dirty="0">
+              <a:rPr lang="en-US" sz="1450" dirty="0">
                 <a:solidFill>
                   <a:srgbClr val="1B2433"/>
                 </a:solidFill>
@@ -4716,7 +4732,7 @@
               </a:rPr>
               <a:t>SpO₂ 100% → PaO₂ ≥ 100 mmHg (the curve is flat on top — very different PaO₂ values produce the same saturation).</a:t>
             </a:r>
-            <a:endParaRPr lang="en-US" sz="1550" dirty="0"/>
+            <a:endParaRPr lang="en-US" sz="1450" dirty="0"/>
           </a:p>
           <a:p>
             <a:pPr marL="177800" indent="-177800">
@@ -4724,13 +4740,13 @@
                 <a:spcPct val="100000"/>
               </a:lnSpc>
               <a:spcAft>
-                <a:spcPts val="900"/>
+                <a:spcPts val="800"/>
               </a:spcAft>
               <a:buSzPct val="100000"/>
               <a:buChar char="•"/>
             </a:pPr>
             <a:r>
-              <a:rPr lang="en-US" sz="1550" dirty="0">
+              <a:rPr lang="en-US" sz="1450" dirty="0">
                 <a:solidFill>
                   <a:srgbClr val="1B2433"/>
                 </a:solidFill>
@@ -4738,9 +4754,9 @@
                 <a:ea typeface="Calibri" pitchFamily="34" charset="-122"/>
                 <a:cs typeface="Calibri" pitchFamily="34" charset="-120"/>
               </a:rPr>
-              <a:t>SpO₂ 95% → PaO₂ ≈ 80 mmHg.</a:t>
-            </a:r>
-            <a:endParaRPr lang="en-US" sz="1550" dirty="0"/>
+              <a:t>SpO₂ 95% → PaO₂ ≈ 80 mmHg. SpO₂ 90% → PaO₂ ≈ 60 mmHg — the edge of the cliff and the threshold for Type I respiratory failure.</a:t>
+            </a:r>
+            <a:endParaRPr lang="en-US" sz="1450" dirty="0"/>
           </a:p>
           <a:p>
             <a:pPr marL="177800" indent="-177800">
@@ -4748,13 +4764,13 @@
                 <a:spcPct val="100000"/>
               </a:lnSpc>
               <a:spcAft>
-                <a:spcPts val="900"/>
+                <a:spcPts val="800"/>
               </a:spcAft>
               <a:buSzPct val="100000"/>
               <a:buChar char="•"/>
             </a:pPr>
             <a:r>
-              <a:rPr lang="en-US" sz="1550" dirty="0">
+              <a:rPr lang="en-US" sz="1450" dirty="0">
                 <a:solidFill>
                   <a:srgbClr val="1B2433"/>
                 </a:solidFill>
@@ -4762,9 +4778,9 @@
                 <a:ea typeface="Calibri" pitchFamily="34" charset="-122"/>
                 <a:cs typeface="Calibri" pitchFamily="34" charset="-120"/>
               </a:rPr>
-              <a:t>SpO₂ 80% → PaO₂ ≈ 45 mmHg.</a:t>
-            </a:r>
-            <a:endParaRPr lang="en-US" sz="1550" dirty="0"/>
+              <a:t>SpO₂ 80% → PaO₂ ≈ 45 mmHg. SpO₂ 70% → PaO₂ ≈ 38 mmHg — minutes from arrest in most adults.</a:t>
+            </a:r>
+            <a:endParaRPr lang="en-US" sz="1450" dirty="0"/>
           </a:p>
           <a:p>
             <a:pPr marL="177800" indent="-177800">
@@ -4772,13 +4788,13 @@
                 <a:spcPct val="100000"/>
               </a:lnSpc>
               <a:spcAft>
-                <a:spcPts val="900"/>
+                <a:spcPts val="800"/>
               </a:spcAft>
               <a:buSzPct val="100000"/>
               <a:buChar char="•"/>
             </a:pPr>
             <a:r>
-              <a:rPr lang="en-US" sz="1550" dirty="0">
+              <a:rPr lang="en-US" sz="1450" dirty="0">
                 <a:solidFill>
                   <a:srgbClr val="1B2433"/>
                 </a:solidFill>
@@ -4786,9 +4802,9 @@
                 <a:ea typeface="Calibri" pitchFamily="34" charset="-122"/>
                 <a:cs typeface="Calibri" pitchFamily="34" charset="-120"/>
               </a:rPr>
-              <a:t>Practical implication: aim for SpO₂ 92–96%.</a:t>
-            </a:r>
-            <a:endParaRPr lang="en-US" sz="1550" dirty="0"/>
+              <a:t>Practical implication: aim for SpO₂ 92–96%. High enough to be off the cliff, low enough to detect deterioration. Targeting 100% does the patient no good and wastes oxygen reserves.</a:t>
+            </a:r>
+            <a:endParaRPr lang="en-US" sz="1450" dirty="0"/>
           </a:p>
         </p:txBody>
       </p:sp>
@@ -5095,7 +5111,7 @@
         <p:spPr>
           <a:xfrm>
             <a:off x="548640" y="2148840"/>
-            <a:ext cx="10058400" cy="4114800"/>
+            <a:ext cx="10058400" cy="4160520"/>
           </a:xfrm>
           <a:prstGeom prst="rect">
             <a:avLst/>
@@ -5112,7 +5128,7 @@
                 <a:spcPct val="100000"/>
               </a:lnSpc>
               <a:spcAft>
-                <a:spcPts val="900"/>
+                <a:spcPts val="1000"/>
               </a:spcAft>
               <a:buSzPct val="100000"/>
               <a:buChar char="•"/>
@@ -5126,7 +5142,7 @@
                 <a:ea typeface="Calibri" pitchFamily="34" charset="-122"/>
                 <a:cs typeface="Calibri" pitchFamily="34" charset="-120"/>
               </a:rPr>
-              <a:t>Hypoxic failure presents first as work-of-breathing changes.</a:t>
+              <a:t>Hypoxic failure presents first as work-of-breathing changes. Tachypnea. Accessory muscle use — sternocleidomastoid, retractions, nasal flaring, tripoding (sitting up with hands braced on knees).</a:t>
             </a:r>
             <a:endParaRPr lang="en-US" sz="1550" dirty="0"/>
           </a:p>
@@ -5136,7 +5152,7 @@
                 <a:spcPct val="100000"/>
               </a:lnSpc>
               <a:spcAft>
-                <a:spcPts val="900"/>
+                <a:spcPts val="1000"/>
               </a:spcAft>
               <a:buSzPct val="100000"/>
               <a:buChar char="•"/>
@@ -5150,7 +5166,7 @@
                 <a:ea typeface="Calibri" pitchFamily="34" charset="-122"/>
                 <a:cs typeface="Calibri" pitchFamily="34" charset="-120"/>
               </a:rPr>
-              <a:t>Mental status is often well-preserved in early Type I failure.</a:t>
+              <a:t>Mental status is often well-preserved in early Type I failure. Hypoxia stimulates ventilation through peripheral chemoreceptors but produces less mental status change than rising CO₂.</a:t>
             </a:r>
             <a:endParaRPr lang="en-US" sz="1550" dirty="0"/>
           </a:p>
@@ -5160,7 +5176,7 @@
                 <a:spcPct val="100000"/>
               </a:lnSpc>
               <a:spcAft>
-                <a:spcPts val="900"/>
+                <a:spcPts val="1000"/>
               </a:spcAft>
               <a:buSzPct val="100000"/>
               <a:buChar char="•"/>
@@ -5174,7 +5190,7 @@
                 <a:ea typeface="Calibri" pitchFamily="34" charset="-122"/>
                 <a:cs typeface="Calibri" pitchFamily="34" charset="-120"/>
               </a:rPr>
-              <a:t>Bedside test for shunt physiology: apply 100% FiO₂ via non-rebreather at flush rate and watch what happens to the saturation.</a:t>
+              <a:t>Bedside test for shunt physiology: apply 100% FiO₂ via non-rebreather at flush rate and watch what happens to the saturation. A patient with diffusion-mediated hypoxia improves quickly.</a:t>
             </a:r>
             <a:endParaRPr lang="en-US" sz="1550" dirty="0"/>
           </a:p>
@@ -5338,7 +5354,7 @@
         <p:spPr>
           <a:xfrm>
             <a:off x="548640" y="2148840"/>
-            <a:ext cx="6309360" cy="4114800"/>
+            <a:ext cx="6309360" cy="4160520"/>
           </a:xfrm>
           <a:prstGeom prst="rect">
             <a:avLst/>
@@ -5355,7 +5371,7 @@
                 <a:spcPct val="100000"/>
               </a:lnSpc>
               <a:spcAft>
-                <a:spcPts val="900"/>
+                <a:spcPts val="1000"/>
               </a:spcAft>
               <a:buSzPct val="100000"/>
               <a:buChar char="•"/>
@@ -5369,7 +5385,7 @@
                 <a:ea typeface="Calibri" pitchFamily="34" charset="-122"/>
                 <a:cs typeface="Calibri" pitchFamily="34" charset="-120"/>
               </a:rPr>
-              <a:t>Hypercapnic failure is more deceptive, because a tiring pump goes quiet, not loud.</a:t>
+              <a:t>Hypercapnic failure is more deceptive, because a tiring pump goes quiet, not loud. A patient retaining CO₂ may look comfortable while the partial pressure climbs — respiratory rate normal or even slowing.</a:t>
             </a:r>
             <a:endParaRPr lang="en-US" sz="1550" dirty="0"/>
           </a:p>
@@ -5379,7 +5395,7 @@
                 <a:spcPct val="100000"/>
               </a:lnSpc>
               <a:spcAft>
-                <a:spcPts val="900"/>
+                <a:spcPts val="1000"/>
               </a:spcAft>
               <a:buSzPct val="100000"/>
               <a:buChar char="•"/>
@@ -5393,7 +5409,7 @@
                 <a:ea typeface="Calibri" pitchFamily="34" charset="-122"/>
                 <a:cs typeface="Calibri" pitchFamily="34" charset="-120"/>
               </a:rPr>
-              <a:t>Mental status correlates with the RATE of CO₂ rise rather than the absolute number.</a:t>
+              <a:t>Mental status correlates with the RATE of CO₂ rise rather than the absolute number. A chronic retainer at PaCO₂ 70 may be cognitively intact; an acute climb to the same value produces somnolence.</a:t>
             </a:r>
             <a:endParaRPr lang="en-US" sz="1550" dirty="0"/>
           </a:p>
@@ -5403,7 +5419,7 @@
                 <a:spcPct val="100000"/>
               </a:lnSpc>
               <a:spcAft>
-                <a:spcPts val="900"/>
+                <a:spcPts val="1000"/>
               </a:spcAft>
               <a:buSzPct val="100000"/>
               <a:buChar char="•"/>
@@ -5417,7 +5433,7 @@
                 <a:ea typeface="Calibri" pitchFamily="34" charset="-122"/>
                 <a:cs typeface="Calibri" pitchFamily="34" charset="-120"/>
               </a:rPr>
-              <a:t>Common scenarios: the COPD patient who tires after a week of escalating bronchospasm; the severe asthmatic whose minute ventilation drops to the point of…</a:t>
+              <a:t>Common scenarios: the COPD patient who tires after a week of escalating bronchospasm; the severe asthmatic whose minute ventilation drops to the point of quiet chest; the opioid-overdosed patient with…</a:t>
             </a:r>
             <a:endParaRPr lang="en-US" sz="1550" dirty="0"/>
           </a:p>
@@ -5726,7 +5742,7 @@
         <p:spPr>
           <a:xfrm>
             <a:off x="548640" y="2148840"/>
-            <a:ext cx="10058400" cy="4114800"/>
+            <a:ext cx="10058400" cy="4160520"/>
           </a:xfrm>
           <a:prstGeom prst="rect">
             <a:avLst/>
@@ -5743,7 +5759,7 @@
                 <a:spcPct val="100000"/>
               </a:lnSpc>
               <a:spcAft>
-                <a:spcPts val="900"/>
+                <a:spcPts val="1000"/>
               </a:spcAft>
               <a:buSzPct val="100000"/>
               <a:buChar char="•"/>
@@ -5757,7 +5773,7 @@
                 <a:ea typeface="Calibri" pitchFamily="34" charset="-122"/>
                 <a:cs typeface="Calibri" pitchFamily="34" charset="-120"/>
               </a:rPr>
-              <a:t>Early signs of respiratory failure are predictable.</a:t>
+              <a:t>Early signs of respiratory failure are predictable. Tachypnea is the earliest. Speech shortens. Patients tripod. Accessory muscles recruit. Skin becomes diaphoretic. The patient is often anxious or restless.</a:t>
             </a:r>
             <a:endParaRPr lang="en-US" sz="1550" dirty="0"/>
           </a:p>
@@ -5767,7 +5783,7 @@
                 <a:spcPct val="100000"/>
               </a:lnSpc>
               <a:spcAft>
-                <a:spcPts val="900"/>
+                <a:spcPts val="1000"/>
               </a:spcAft>
               <a:buSzPct val="100000"/>
               <a:buChar char="•"/>
@@ -5781,7 +5797,7 @@
                 <a:ea typeface="Calibri" pitchFamily="34" charset="-122"/>
                 <a:cs typeface="Calibri" pitchFamily="34" charset="-120"/>
               </a:rPr>
-              <a:t>Late signs are subtle and dangerous.</a:t>
+              <a:t>Late signs are subtle and dangerous. The previously tachypneic patient becomes quiet. RR drops. HR, which had been elevated, begins to fall.</a:t>
             </a:r>
             <a:endParaRPr lang="en-US" sz="1550" dirty="0"/>
           </a:p>
@@ -5791,7 +5807,7 @@
                 <a:spcPct val="100000"/>
               </a:lnSpc>
               <a:spcAft>
-                <a:spcPts val="900"/>
+                <a:spcPts val="1000"/>
               </a:spcAft>
               <a:buSzPct val="100000"/>
               <a:buChar char="•"/>
@@ -5805,7 +5821,7 @@
                 <a:ea typeface="Calibri" pitchFamily="34" charset="-122"/>
                 <a:cs typeface="Calibri" pitchFamily="34" charset="-120"/>
               </a:rPr>
-              <a:t>Some call this the calm before the storm.</a:t>
+              <a:t>Some call this the calm before the storm. It is pre-arrest. The patient has run out of compensatory reserve.</a:t>
             </a:r>
             <a:endParaRPr lang="en-US" sz="1550" dirty="0"/>
           </a:p>
@@ -5969,7 +5985,7 @@
         <p:spPr>
           <a:xfrm>
             <a:off x="548640" y="2148840"/>
-            <a:ext cx="10058400" cy="4114800"/>
+            <a:ext cx="10058400" cy="4160520"/>
           </a:xfrm>
           <a:prstGeom prst="rect">
             <a:avLst/>
@@ -5986,7 +6002,7 @@
                 <a:spcPct val="100000"/>
               </a:lnSpc>
               <a:spcAft>
-                <a:spcPts val="900"/>
+                <a:spcPts val="1000"/>
               </a:spcAft>
               <a:buSzPct val="100000"/>
               <a:buChar char="•"/>
@@ -6000,7 +6016,7 @@
                 <a:ea typeface="Calibri" pitchFamily="34" charset="-122"/>
                 <a:cs typeface="Calibri" pitchFamily="34" charset="-120"/>
               </a:rPr>
-              <a:t>EtCO₂ is the partial pressure of CO₂ measured at the end of exhalation.</a:t>
+              <a:t>EtCO₂ is the partial pressure of CO₂ measured at the end of exhalation. In a healthy patient, EtCO₂ runs 2 to 5 mmHg lower than PaCO₂.</a:t>
             </a:r>
             <a:endParaRPr lang="en-US" sz="1550" dirty="0"/>
           </a:p>
@@ -6010,7 +6026,7 @@
                 <a:spcPct val="100000"/>
               </a:lnSpc>
               <a:spcAft>
-                <a:spcPts val="900"/>
+                <a:spcPts val="1000"/>
               </a:spcAft>
               <a:buSzPct val="100000"/>
               <a:buChar char="•"/>
@@ -6024,7 +6040,7 @@
                 <a:ea typeface="Calibri" pitchFamily="34" charset="-122"/>
                 <a:cs typeface="Calibri" pitchFamily="34" charset="-120"/>
               </a:rPr>
-              <a:t>Normal adult EtCO₂ is 35 to 45 mmHg.</a:t>
+              <a:t>Normal adult EtCO₂ is 35 to 45 mmHg. A rising trend over several minutes in a non-intubated patient suggests fatigue.</a:t>
             </a:r>
             <a:endParaRPr lang="en-US" sz="1550" dirty="0"/>
           </a:p>
@@ -6034,7 +6050,7 @@
                 <a:spcPct val="100000"/>
               </a:lnSpc>
               <a:spcAft>
-                <a:spcPts val="900"/>
+                <a:spcPts val="1000"/>
               </a:spcAft>
               <a:buSzPct val="100000"/>
               <a:buChar char="•"/>
@@ -6048,7 +6064,7 @@
                 <a:ea typeface="Calibri" pitchFamily="34" charset="-122"/>
                 <a:cs typeface="Calibri" pitchFamily="34" charset="-120"/>
               </a:rPr>
-              <a:t>Capnography has an underappreciated role in CPR.</a:t>
+              <a:t>Capnography has an underappreciated role in CPR. AHA recommends continuous waveform capnography during resuscitation.</a:t>
             </a:r>
             <a:endParaRPr lang="en-US" sz="1550" dirty="0"/>
           </a:p>
@@ -6212,7 +6228,7 @@
         <p:spPr>
           <a:xfrm>
             <a:off x="548640" y="2148840"/>
-            <a:ext cx="6309360" cy="4114800"/>
+            <a:ext cx="6309360" cy="4160520"/>
           </a:xfrm>
           <a:prstGeom prst="rect">
             <a:avLst/>
@@ -6229,7 +6245,7 @@
                 <a:spcPct val="100000"/>
               </a:lnSpc>
               <a:spcAft>
-                <a:spcPts val="900"/>
+                <a:spcPts val="1000"/>
               </a:spcAft>
               <a:buSzPct val="100000"/>
               <a:buChar char="•"/>
@@ -6243,7 +6259,7 @@
                 <a:ea typeface="Calibri" pitchFamily="34" charset="-122"/>
                 <a:cs typeface="Calibri" pitchFamily="34" charset="-120"/>
               </a:rPr>
-              <a:t>Normal: a box-like waveform.</a:t>
+              <a:t>Normal: a box-like waveform. Sharp upstroke, flat plateau at the EtCO₂ value, sharp drop as the next inspiration begins.</a:t>
             </a:r>
             <a:endParaRPr lang="en-US" sz="1550" dirty="0"/>
           </a:p>
@@ -6253,7 +6269,7 @@
                 <a:spcPct val="100000"/>
               </a:lnSpc>
               <a:spcAft>
-                <a:spcPts val="900"/>
+                <a:spcPts val="1000"/>
               </a:spcAft>
               <a:buSzPct val="100000"/>
               <a:buChar char="•"/>
@@ -6267,7 +6283,7 @@
                 <a:ea typeface="Calibri" pitchFamily="34" charset="-122"/>
                 <a:cs typeface="Calibri" pitchFamily="34" charset="-120"/>
               </a:rPr>
-              <a:t>Shark fin: the upstroke is sloped rather than sharp.</a:t>
+              <a:t>Shark fin: the upstroke is sloped rather than sharp. This is the most specific bedside sign of bronchospasm — asthma, COPD exacerbation, anaphylaxis.</a:t>
             </a:r>
             <a:endParaRPr lang="en-US" sz="1550" dirty="0"/>
           </a:p>
@@ -6277,7 +6293,7 @@
                 <a:spcPct val="100000"/>
               </a:lnSpc>
               <a:spcAft>
-                <a:spcPts val="900"/>
+                <a:spcPts val="1000"/>
               </a:spcAft>
               <a:buSzPct val="100000"/>
               <a:buChar char="•"/>
@@ -6291,7 +6307,7 @@
                 <a:ea typeface="Calibri" pitchFamily="34" charset="-122"/>
                 <a:cs typeface="Calibri" pitchFamily="34" charset="-120"/>
               </a:rPr>
-              <a:t>Rebreathing: the baseline is elevated rather than returning to zero between breaths.</a:t>
+              <a:t>Rebreathing: the baseline is elevated rather than returning to zero between breaths. Common causes: a non-fitted NIV mask seal, an exhausted CO₂ absorber, or a kinked one-way valve.</a:t>
             </a:r>
             <a:endParaRPr lang="en-US" sz="1550" dirty="0"/>
           </a:p>
@@ -6301,7 +6317,7 @@
                 <a:spcPct val="100000"/>
               </a:lnSpc>
               <a:spcAft>
-                <a:spcPts val="900"/>
+                <a:spcPts val="1000"/>
               </a:spcAft>
               <a:buSzPct val="100000"/>
               <a:buChar char="•"/>
@@ -6315,7 +6331,7 @@
                 <a:ea typeface="Calibri" pitchFamily="34" charset="-122"/>
                 <a:cs typeface="Calibri" pitchFamily="34" charset="-120"/>
               </a:rPr>
-              <a:t>Lost waveform: sudden drop to near zero.</a:t>
+              <a:t>Lost waveform: sudden drop to near zero. DOPE algorithm time — dislodgement, obstruction, pneumothorax, equipment. We cover this in Module 7.</a:t>
             </a:r>
             <a:endParaRPr lang="en-US" sz="1550" dirty="0"/>
           </a:p>

--- a/vta/slides/Module_2_Recognizing_Respiratory_Failure.pptx
+++ b/vta/slides/Module_2_Recognizing_Respiratory_Failure.pptx
@@ -4808,151 +4808,30 @@
           </a:p>
         </p:txBody>
       </p:sp>
-      <p:sp>
-        <p:nvSpPr>
-          <p:cNvPr id="6" name="Shape 4"/>
-          <p:cNvSpPr/>
-          <p:nvPr/>
-        </p:nvSpPr>
-        <p:spPr>
-          <a:xfrm>
-            <a:off x="7315200" y="2148840"/>
-            <a:ext cx="4325112" cy="3840480"/>
-          </a:xfrm>
-          <a:prstGeom prst="roundRect">
-            <a:avLst>
-              <a:gd name="adj" fmla="val 2381"/>
-            </a:avLst>
-          </a:prstGeom>
-          <a:solidFill>
-            <a:srgbClr val="E7F0FD"/>
-          </a:solidFill>
-          <a:ln/>
-        </p:spPr>
-      </p:sp>
-      <p:sp>
-        <p:nvSpPr>
-          <p:cNvPr id="7" name="Text 5"/>
-          <p:cNvSpPr/>
-          <p:nvPr/>
-        </p:nvSpPr>
-        <p:spPr>
-          <a:xfrm>
-            <a:off x="7589520" y="2377440"/>
-            <a:ext cx="3776472" cy="320040"/>
+      <p:pic>
+        <p:nvPicPr>
+          <p:cNvPr id="6" name="Image 0" descr="/tmp/claude-0/-home-user-amr-kc-protocols/883711fe-5eaa-500f-ae13-4d63d2ddcc7e/scratchpad/pngs/oxyhb.png">    </p:cNvPr>
+          <p:cNvPicPr>
+            <a:picLocks noChangeAspect="1"/>
+          </p:cNvPicPr>
+          <p:nvPr/>
+        </p:nvPicPr>
+        <p:blipFill>
+          <a:blip r:embed="rId1"/>
+          <a:stretch>
+            <a:fillRect/>
+          </a:stretch>
+        </p:blipFill>
+        <p:spPr>
+          <a:xfrm>
+            <a:off x="7040880" y="2559570"/>
+            <a:ext cx="4709160" cy="2470379"/>
           </a:xfrm>
           <a:prstGeom prst="rect">
             <a:avLst/>
           </a:prstGeom>
-          <a:noFill/>
-          <a:ln/>
-        </p:spPr>
-        <p:txBody>
-          <a:bodyPr wrap="square" rtlCol="0" anchor="ctr"/>
-          <a:lstStyle/>
-          <a:p>
-            <a:pPr indent="0" marL="0">
-              <a:buNone/>
-            </a:pPr>
-            <a:r>
-              <a:rPr lang="en-US" sz="1200" b="1" spc="200" kern="0" dirty="0">
-                <a:solidFill>
-                  <a:srgbClr val="1B63C4"/>
-                </a:solidFill>
-                <a:latin typeface="Calibri" pitchFamily="34" charset="0"/>
-                <a:ea typeface="Calibri" pitchFamily="34" charset="-122"/>
-                <a:cs typeface="Calibri" pitchFamily="34" charset="-120"/>
-              </a:rPr>
-              <a:t>EVIDENCE</a:t>
-            </a:r>
-            <a:endParaRPr lang="en-US" sz="1200" dirty="0"/>
-          </a:p>
-        </p:txBody>
-      </p:sp>
-      <p:sp>
-        <p:nvSpPr>
-          <p:cNvPr id="8" name="Text 6"/>
-          <p:cNvSpPr/>
-          <p:nvPr/>
-        </p:nvSpPr>
-        <p:spPr>
-          <a:xfrm>
-            <a:off x="7589520" y="2715768"/>
-            <a:ext cx="3776472" cy="640080"/>
-          </a:xfrm>
-          <a:prstGeom prst="rect">
-            <a:avLst/>
-          </a:prstGeom>
-          <a:noFill/>
-          <a:ln/>
-        </p:spPr>
-        <p:txBody>
-          <a:bodyPr wrap="square" rtlCol="0" anchor="t"/>
-          <a:lstStyle/>
-          <a:p>
-            <a:pPr indent="0" marL="0">
-              <a:lnSpc>
-                <a:spcPct val="95000"/>
-              </a:lnSpc>
-              <a:buNone/>
-            </a:pPr>
-            <a:r>
-              <a:rPr lang="en-US" sz="1700" b="1" dirty="0">
-                <a:solidFill>
-                  <a:srgbClr val="173A68"/>
-                </a:solidFill>
-                <a:latin typeface="Cambria" pitchFamily="34" charset="0"/>
-                <a:ea typeface="Cambria" pitchFamily="34" charset="-122"/>
-                <a:cs typeface="Cambria" pitchFamily="34" charset="-120"/>
-              </a:rPr>
-              <a:t>Hyperoxia after ROSC</a:t>
-            </a:r>
-            <a:endParaRPr lang="en-US" sz="1700" dirty="0"/>
-          </a:p>
-        </p:txBody>
-      </p:sp>
-      <p:sp>
-        <p:nvSpPr>
-          <p:cNvPr id="9" name="Text 7"/>
-          <p:cNvSpPr/>
-          <p:nvPr/>
-        </p:nvSpPr>
-        <p:spPr>
-          <a:xfrm>
-            <a:off x="7589520" y="3474720"/>
-            <a:ext cx="3776472" cy="2286000"/>
-          </a:xfrm>
-          <a:prstGeom prst="rect">
-            <a:avLst/>
-          </a:prstGeom>
-          <a:noFill/>
-          <a:ln/>
-        </p:spPr>
-        <p:txBody>
-          <a:bodyPr wrap="square" rtlCol="0" anchor="t"/>
-          <a:lstStyle/>
-          <a:p>
-            <a:pPr indent="0" marL="0">
-              <a:lnSpc>
-                <a:spcPct val="103000"/>
-              </a:lnSpc>
-              <a:buNone/>
-            </a:pPr>
-            <a:r>
-              <a:rPr lang="en-US" sz="1350" dirty="0">
-                <a:solidFill>
-                  <a:srgbClr val="1B2433"/>
-                </a:solidFill>
-                <a:latin typeface="Calibri" pitchFamily="34" charset="0"/>
-                <a:ea typeface="Calibri" pitchFamily="34" charset="-122"/>
-                <a:cs typeface="Calibri" pitchFamily="34" charset="-120"/>
-              </a:rPr>
-              <a:t>Multiple observational studies show worse neurologic outcomes in cardiac arrest survivors maintained at PaO₂ &gt; 300 mmHg post-arrest. AHA recommends titrating FiO₂ to SpO₂ 90–98% post-ROSC (2025 AHA update; the prior target was 92–98%).</a:t>
-            </a:r>
-            <a:endParaRPr lang="en-US" sz="1350" dirty="0"/>
-          </a:p>
-        </p:txBody>
-      </p:sp>
+        </p:spPr>
+      </p:pic>
     </p:spTree>
   </p:cSld>
   <p:clrMapOvr>
@@ -6337,151 +6216,30 @@
           </a:p>
         </p:txBody>
       </p:sp>
-      <p:sp>
-        <p:nvSpPr>
-          <p:cNvPr id="6" name="Shape 4"/>
-          <p:cNvSpPr/>
-          <p:nvPr/>
-        </p:nvSpPr>
-        <p:spPr>
-          <a:xfrm>
-            <a:off x="7315200" y="2148840"/>
-            <a:ext cx="4325112" cy="3840480"/>
-          </a:xfrm>
-          <a:prstGeom prst="roundRect">
-            <a:avLst>
-              <a:gd name="adj" fmla="val 2381"/>
-            </a:avLst>
-          </a:prstGeom>
-          <a:solidFill>
-            <a:srgbClr val="FBEFDD"/>
-          </a:solidFill>
-          <a:ln/>
-        </p:spPr>
-      </p:sp>
-      <p:sp>
-        <p:nvSpPr>
-          <p:cNvPr id="7" name="Text 5"/>
-          <p:cNvSpPr/>
-          <p:nvPr/>
-        </p:nvSpPr>
-        <p:spPr>
-          <a:xfrm>
-            <a:off x="7589520" y="2377440"/>
-            <a:ext cx="3776472" cy="320040"/>
+      <p:pic>
+        <p:nvPicPr>
+          <p:cNvPr id="6" name="Image 0" descr="/tmp/claude-0/-home-user-amr-kc-protocols/883711fe-5eaa-500f-ae13-4d63d2ddcc7e/scratchpad/pngs/capno.png">    </p:cNvPr>
+          <p:cNvPicPr>
+            <a:picLocks noChangeAspect="1"/>
+          </p:cNvPicPr>
+          <p:nvPr/>
+        </p:nvPicPr>
+        <p:blipFill>
+          <a:blip r:embed="rId1"/>
+          <a:stretch>
+            <a:fillRect/>
+          </a:stretch>
+        </p:blipFill>
+        <p:spPr>
+          <a:xfrm>
+            <a:off x="7040880" y="2814328"/>
+            <a:ext cx="4709160" cy="1960863"/>
           </a:xfrm>
           <a:prstGeom prst="rect">
             <a:avLst/>
           </a:prstGeom>
-          <a:noFill/>
-          <a:ln/>
-        </p:spPr>
-        <p:txBody>
-          <a:bodyPr wrap="square" rtlCol="0" anchor="ctr"/>
-          <a:lstStyle/>
-          <a:p>
-            <a:pPr indent="0" marL="0">
-              <a:buNone/>
-            </a:pPr>
-            <a:r>
-              <a:rPr lang="en-US" sz="1200" b="1" spc="200" kern="0" dirty="0">
-                <a:solidFill>
-                  <a:srgbClr val="9C540B"/>
-                </a:solidFill>
-                <a:latin typeface="Calibri" pitchFamily="34" charset="0"/>
-                <a:ea typeface="Calibri" pitchFamily="34" charset="-122"/>
-                <a:cs typeface="Calibri" pitchFamily="34" charset="-120"/>
-              </a:rPr>
-              <a:t>CLINICAL PEARL</a:t>
-            </a:r>
-            <a:endParaRPr lang="en-US" sz="1200" dirty="0"/>
-          </a:p>
-        </p:txBody>
-      </p:sp>
-      <p:sp>
-        <p:nvSpPr>
-          <p:cNvPr id="8" name="Text 6"/>
-          <p:cNvSpPr/>
-          <p:nvPr/>
-        </p:nvSpPr>
-        <p:spPr>
-          <a:xfrm>
-            <a:off x="7589520" y="2715768"/>
-            <a:ext cx="3776472" cy="640080"/>
-          </a:xfrm>
-          <a:prstGeom prst="rect">
-            <a:avLst/>
-          </a:prstGeom>
-          <a:noFill/>
-          <a:ln/>
-        </p:spPr>
-        <p:txBody>
-          <a:bodyPr wrap="square" rtlCol="0" anchor="t"/>
-          <a:lstStyle/>
-          <a:p>
-            <a:pPr indent="0" marL="0">
-              <a:lnSpc>
-                <a:spcPct val="95000"/>
-              </a:lnSpc>
-              <a:buNone/>
-            </a:pPr>
-            <a:r>
-              <a:rPr lang="en-US" sz="1700" b="1" dirty="0">
-                <a:solidFill>
-                  <a:srgbClr val="173A68"/>
-                </a:solidFill>
-                <a:latin typeface="Cambria" pitchFamily="34" charset="0"/>
-                <a:ea typeface="Cambria" pitchFamily="34" charset="-122"/>
-                <a:cs typeface="Cambria" pitchFamily="34" charset="-120"/>
-              </a:rPr>
-              <a:t>Shark fin = bronchospasm</a:t>
-            </a:r>
-            <a:endParaRPr lang="en-US" sz="1700" dirty="0"/>
-          </a:p>
-        </p:txBody>
-      </p:sp>
-      <p:sp>
-        <p:nvSpPr>
-          <p:cNvPr id="9" name="Text 7"/>
-          <p:cNvSpPr/>
-          <p:nvPr/>
-        </p:nvSpPr>
-        <p:spPr>
-          <a:xfrm>
-            <a:off x="7589520" y="3474720"/>
-            <a:ext cx="3776472" cy="2286000"/>
-          </a:xfrm>
-          <a:prstGeom prst="rect">
-            <a:avLst/>
-          </a:prstGeom>
-          <a:noFill/>
-          <a:ln/>
-        </p:spPr>
-        <p:txBody>
-          <a:bodyPr wrap="square" rtlCol="0" anchor="t"/>
-          <a:lstStyle/>
-          <a:p>
-            <a:pPr indent="0" marL="0">
-              <a:lnSpc>
-                <a:spcPct val="103000"/>
-              </a:lnSpc>
-              <a:buNone/>
-            </a:pPr>
-            <a:r>
-              <a:rPr lang="en-US" sz="1350" dirty="0">
-                <a:solidFill>
-                  <a:srgbClr val="1B2433"/>
-                </a:solidFill>
-                <a:latin typeface="Calibri" pitchFamily="34" charset="0"/>
-                <a:ea typeface="Calibri" pitchFamily="34" charset="-122"/>
-                <a:cs typeface="Calibri" pitchFamily="34" charset="-120"/>
-              </a:rPr>
-              <a:t>If a vented patient's waveform turns shark-fin, treat the obstruction (bronchodilator, extended exhalation time). Don't chase the EtCO₂ number.</a:t>
-            </a:r>
-            <a:endParaRPr lang="en-US" sz="1350" dirty="0"/>
-          </a:p>
-        </p:txBody>
-      </p:sp>
+        </p:spPr>
+      </p:pic>
     </p:spTree>
   </p:cSld>
   <p:clrMapOvr>
